--- a/4_Data_analysis_and_CV_based_condensate_monitoring.pptx
+++ b/4_Data_analysis_and_CV_based_condensate_monitoring.pptx
@@ -415,7 +415,7 @@
           <p:nvPr>
             <p:extLst>
               <p:ext uri="{F5677B7D-0D2A-4D9B-9A5C-6D8D7D0E5A5D}">
-                <pptd:line xmlns:pptd="https://kimi-design.msh.team/pptd/2026" xmlns:mc="http://schemas.openxmlformats.org/markup-compatibility/2006" xmlns:m="http://schemas.openxmlformats.org/officeDocument/2006/math" xmlns:cx="http://schemas.microsoft.com/office/drawing/2014/chartex" xmlns:c="http://schemas.openxmlformats.org/drawingml/2006/chart" xmlns:a14="http://schemas.microsoft.com/office/drawing/2010/main" xmlns="" encoding="base64url">eyJ2aWV3Qm94IjpbMSw0N10sInBvaW50cyI6IjAsMCAwLDQ3In0</pptd:line>
+                <pptd:line xmlns="" xmlns:a14="http://schemas.microsoft.com/office/drawing/2010/main" xmlns:c="http://schemas.openxmlformats.org/drawingml/2006/chart" xmlns:cx="http://schemas.microsoft.com/office/drawing/2014/chartex" xmlns:m="http://schemas.openxmlformats.org/officeDocument/2006/math" xmlns:mc="http://schemas.openxmlformats.org/markup-compatibility/2006" xmlns:pptd="https://kimi-design.msh.team/pptd/2026" encoding="base64url">eyJ2aWV3Qm94IjpbMSw0N10sInBvaW50cyI6IjAsMCAwLDQ3In0</pptd:line>
               </p:ext>
             </p:extLst>
           </p:nvPr>
@@ -518,7 +518,7 @@
           <p:nvPr>
             <p:extLst>
               <p:ext uri="{F5677B7D-0D2A-4D9B-9A5C-6D8D7D0E5A5D}">
-                <pptd:line xmlns:pptd="https://kimi-design.msh.team/pptd/2026" xmlns:mc="http://schemas.openxmlformats.org/markup-compatibility/2006" xmlns:m="http://schemas.openxmlformats.org/officeDocument/2006/math" xmlns:cx="http://schemas.microsoft.com/office/drawing/2014/chartex" xmlns:c="http://schemas.openxmlformats.org/drawingml/2006/chart" xmlns:a14="http://schemas.microsoft.com/office/drawing/2010/main" xmlns="" encoding="base64url">eyJ2aWV3Qm94IjpbMSw0N10sInBvaW50cyI6IjAsMCAwLDQ3In0</pptd:line>
+                <pptd:line xmlns="" xmlns:a14="http://schemas.microsoft.com/office/drawing/2010/main" xmlns:c="http://schemas.openxmlformats.org/drawingml/2006/chart" xmlns:cx="http://schemas.microsoft.com/office/drawing/2014/chartex" xmlns:m="http://schemas.openxmlformats.org/officeDocument/2006/math" xmlns:mc="http://schemas.openxmlformats.org/markup-compatibility/2006" xmlns:pptd="https://kimi-design.msh.team/pptd/2026" encoding="base64url">eyJ2aWV3Qm94IjpbMSw0N10sInBvaW50cyI6IjAsMCAwLDQ3In0</pptd:line>
               </p:ext>
             </p:extLst>
           </p:nvPr>
@@ -621,7 +621,7 @@
           <p:nvPr>
             <p:extLst>
               <p:ext uri="{F5677B7D-0D2A-4D9B-9A5C-6D8D7D0E5A5D}">
-                <pptd:line xmlns:pptd="https://kimi-design.msh.team/pptd/2026" xmlns:mc="http://schemas.openxmlformats.org/markup-compatibility/2006" xmlns:m="http://schemas.openxmlformats.org/officeDocument/2006/math" xmlns:cx="http://schemas.microsoft.com/office/drawing/2014/chartex" xmlns:c="http://schemas.openxmlformats.org/drawingml/2006/chart" xmlns:a14="http://schemas.microsoft.com/office/drawing/2010/main" xmlns="" encoding="base64url">eyJ2aWV3Qm94IjpbMSw0N10sInBvaW50cyI6IjAsMCAwLDQ3In0</pptd:line>
+                <pptd:line xmlns="" xmlns:a14="http://schemas.microsoft.com/office/drawing/2010/main" xmlns:c="http://schemas.openxmlformats.org/drawingml/2006/chart" xmlns:cx="http://schemas.microsoft.com/office/drawing/2014/chartex" xmlns:m="http://schemas.openxmlformats.org/officeDocument/2006/math" xmlns:mc="http://schemas.openxmlformats.org/markup-compatibility/2006" xmlns:pptd="https://kimi-design.msh.team/pptd/2026" encoding="base64url">eyJ2aWV3Qm94IjpbMSw0N10sInBvaW50cyI6IjAsMCAwLDQ3In0</pptd:line>
               </p:ext>
             </p:extLst>
           </p:nvPr>
@@ -805,7 +805,7 @@
                 <a:latin typeface="Arial"/>
                 <a:ea typeface="Arial"/>
               </a:rPr>
-              <a:t> — одинаковый режим контроля в течение смены</a:t>
+              <a:t> - одинаковый режим контроля в течение смены</a:t>
             </a:r>
             <a:endParaRPr lang="en-US" sz="1300" noProof="1"/>
           </a:p>
@@ -833,7 +833,7 @@
                 <a:latin typeface="Arial"/>
                 <a:ea typeface="Arial"/>
               </a:rPr>
-              <a:t> — удаляются только дефектные лотки</a:t>
+              <a:t> - удаляются только дефектные лотки</a:t>
             </a:r>
             <a:endParaRPr lang="en-US" sz="1300" noProof="1"/>
           </a:p>
@@ -861,7 +861,7 @@
                 <a:latin typeface="Arial"/>
                 <a:ea typeface="Arial"/>
               </a:rPr>
-              <a:t> — изображение и результат по каждому случаю</a:t>
+              <a:t> - изображение и результат по каждому случаю</a:t>
             </a:r>
             <a:endParaRPr lang="en-US" sz="1300" noProof="1"/>
           </a:p>
@@ -889,7 +889,7 @@
                 <a:latin typeface="Arial"/>
                 <a:ea typeface="Arial"/>
               </a:rPr>
-              <a:t> — меньше пропусков, возвратов и списаний относительно точки А</a:t>
+              <a:t> - меньше пропусков, возвратов и списаний относительно точки А</a:t>
             </a:r>
             <a:endParaRPr lang="en-US" sz="1300" noProof="1"/>
           </a:p>
@@ -954,7 +954,7 @@
           <p:nvPr>
             <p:extLst>
               <p:ext uri="{F5677B7D-0D2A-4D9B-9A5C-6D8D7D0E5A5D}">
-                <pptd:line xmlns:pptd="https://kimi-design.msh.team/pptd/2026" xmlns:mc="http://schemas.openxmlformats.org/markup-compatibility/2006" xmlns:m="http://schemas.openxmlformats.org/officeDocument/2006/math" xmlns:cx="http://schemas.microsoft.com/office/drawing/2014/chartex" xmlns:c="http://schemas.openxmlformats.org/drawingml/2006/chart" xmlns:a14="http://schemas.microsoft.com/office/drawing/2010/main" xmlns="" encoding="base64url">eyJ2aWV3Qm94IjpbMSwyNDZdLCJwb2ludHMiOiIwLDAgMCwyNDYifQ</pptd:line>
+                <pptd:line xmlns="" xmlns:a14="http://schemas.microsoft.com/office/drawing/2010/main" xmlns:c="http://schemas.openxmlformats.org/drawingml/2006/chart" xmlns:cx="http://schemas.microsoft.com/office/drawing/2014/chartex" xmlns:m="http://schemas.openxmlformats.org/officeDocument/2006/math" xmlns:mc="http://schemas.openxmlformats.org/markup-compatibility/2006" xmlns:pptd="https://kimi-design.msh.team/pptd/2026" encoding="base64url">eyJ2aWV3Qm94IjpbMSwyNDZdLCJwb2ludHMiOiIwLDAgMCwyNDYifQ</pptd:line>
               </p:ext>
             </p:extLst>
           </p:nvPr>
@@ -1524,7 +1524,7 @@
           <p:nvPr>
             <p:extLst>
               <p:ext uri="{F5677B7D-0D2A-4D9B-9A5C-6D8D7D0E5A5D}">
-                <pptd:icon xmlns:pptd="https://kimi-design.msh.team/pptd/2026" xmlns:mc="http://schemas.openxmlformats.org/markup-compatibility/2006" xmlns:m="http://schemas.openxmlformats.org/officeDocument/2006/math" xmlns:cx="http://schemas.microsoft.com/office/drawing/2014/chartex" xmlns:c="http://schemas.openxmlformats.org/drawingml/2006/chart" xmlns:a14="http://schemas.microsoft.com/office/drawing/2010/main" xmlns="" encoding="base64url">eyJpY29uTmFtZSI6ImZhczpjYW1lcmEifQ</pptd:icon>
+                <pptd:icon xmlns="" xmlns:a14="http://schemas.microsoft.com/office/drawing/2010/main" xmlns:c="http://schemas.openxmlformats.org/drawingml/2006/chart" xmlns:cx="http://schemas.microsoft.com/office/drawing/2014/chartex" xmlns:m="http://schemas.openxmlformats.org/officeDocument/2006/math" xmlns:mc="http://schemas.openxmlformats.org/markup-compatibility/2006" xmlns:pptd="https://kimi-design.msh.team/pptd/2026" encoding="base64url">eyJpY29uTmFtZSI6ImZhczpjYW1lcmEifQ</pptd:icon>
               </p:ext>
             </p:extLst>
           </p:nvPr>
@@ -1726,14 +1726,14 @@
           <p:nvPr>
             <p:extLst>
               <p:ext uri="{F5677B7D-0D2A-4D9B-9A5C-6D8D7D0E5A5D}">
-                <pptd:line xmlns:pptd="https://kimi-design.msh.team/pptd/2026" xmlns:mc="http://schemas.openxmlformats.org/markup-compatibility/2006" xmlns:m="http://schemas.openxmlformats.org/officeDocument/2006/math" xmlns:cx="http://schemas.microsoft.com/office/drawing/2014/chartex" xmlns:c="http://schemas.openxmlformats.org/drawingml/2006/chart" xmlns:a14="http://schemas.microsoft.com/office/drawing/2010/main" xmlns="" encoding="base64url">eyJ2aWV3Qm94IjpbNDAsMV0sInBvaW50cyI6IjAsMCA0MCwwIn0</pptd:line>
+                <pptd:line xmlns="" xmlns:a14="http://schemas.microsoft.com/office/drawing/2010/main" xmlns:c="http://schemas.openxmlformats.org/drawingml/2006/chart" xmlns:cx="http://schemas.microsoft.com/office/drawing/2014/chartex" xmlns:m="http://schemas.openxmlformats.org/officeDocument/2006/math" xmlns:mc="http://schemas.openxmlformats.org/markup-compatibility/2006" xmlns:pptd="https://kimi-design.msh.team/pptd/2026" encoding="base64url">eyJ2aWV3Qm94IjpbNDAsMV0sInBvaW50cyI6IjAsMCA0MCwwIn0</pptd:line>
               </p:ext>
             </p:extLst>
           </p:nvPr>
         </p:nvSpPr>
         <p:spPr>
           <a:xfrm>
-            <a:off x="2781300" y="2514600"/>
+            <a:off x="3433099" y="2514600"/>
             <a:ext cx="508000" cy="12700"/>
           </a:xfrm>
           <a:custGeom>
@@ -1770,14 +1770,14 @@
           <p:nvPr>
             <p:extLst>
               <p:ext uri="{F5677B7D-0D2A-4D9B-9A5C-6D8D7D0E5A5D}">
-                <pptd:icon xmlns:pptd="https://kimi-design.msh.team/pptd/2026" xmlns:mc="http://schemas.openxmlformats.org/markup-compatibility/2006" xmlns:m="http://schemas.openxmlformats.org/officeDocument/2006/math" xmlns:cx="http://schemas.microsoft.com/office/drawing/2014/chartex" xmlns:c="http://schemas.openxmlformats.org/drawingml/2006/chart" xmlns:a14="http://schemas.microsoft.com/office/drawing/2010/main" xmlns="" encoding="base64url">eyJpY29uTmFtZSI6ImZhczptaWNyb2NoaXAifQ</pptd:icon>
+                <pptd:icon xmlns="" xmlns:a14="http://schemas.microsoft.com/office/drawing/2010/main" xmlns:c="http://schemas.openxmlformats.org/drawingml/2006/chart" xmlns:cx="http://schemas.microsoft.com/office/drawing/2014/chartex" xmlns:m="http://schemas.openxmlformats.org/officeDocument/2006/math" xmlns:mc="http://schemas.openxmlformats.org/markup-compatibility/2006" xmlns:pptd="https://kimi-design.msh.team/pptd/2026" encoding="base64url">eyJpY29uTmFtZSI6ImZhczptaWNyb2NoaXAifQ</pptd:icon>
               </p:ext>
             </p:extLst>
           </p:nvPr>
         </p:nvSpPr>
         <p:spPr>
           <a:xfrm>
-            <a:off x="3390900" y="2311400"/>
+            <a:off x="4042699" y="2311400"/>
             <a:ext cx="381000" cy="381000"/>
           </a:xfrm>
           <a:custGeom>
@@ -2184,14 +2184,14 @@
           <p:nvPr>
             <p:extLst>
               <p:ext uri="{F5677B7D-0D2A-4D9B-9A5C-6D8D7D0E5A5D}">
-                <pptd:line xmlns:pptd="https://kimi-design.msh.team/pptd/2026" xmlns:mc="http://schemas.openxmlformats.org/markup-compatibility/2006" xmlns:m="http://schemas.openxmlformats.org/officeDocument/2006/math" xmlns:cx="http://schemas.microsoft.com/office/drawing/2014/chartex" xmlns:c="http://schemas.openxmlformats.org/drawingml/2006/chart" xmlns:a14="http://schemas.microsoft.com/office/drawing/2010/main" xmlns="" encoding="base64url">eyJ2aWV3Qm94IjpbNDAsMV0sInBvaW50cyI6IjAsMCA0MCwwIn0</pptd:line>
+                <pptd:line xmlns="" xmlns:a14="http://schemas.microsoft.com/office/drawing/2010/main" xmlns:c="http://schemas.openxmlformats.org/drawingml/2006/chart" xmlns:cx="http://schemas.microsoft.com/office/drawing/2014/chartex" xmlns:m="http://schemas.openxmlformats.org/officeDocument/2006/math" xmlns:mc="http://schemas.openxmlformats.org/markup-compatibility/2006" xmlns:pptd="https://kimi-design.msh.team/pptd/2026" encoding="base64url">eyJ2aWV3Qm94IjpbNDAsMV0sInBvaW50cyI6IjAsMCA0MCwwIn0</pptd:line>
               </p:ext>
             </p:extLst>
           </p:nvPr>
         </p:nvSpPr>
         <p:spPr>
           <a:xfrm>
-            <a:off x="5562600" y="2514600"/>
+            <a:off x="6214399" y="2514600"/>
             <a:ext cx="508000" cy="12700"/>
           </a:xfrm>
           <a:custGeom>
@@ -2228,14 +2228,14 @@
           <p:nvPr>
             <p:extLst>
               <p:ext uri="{F5677B7D-0D2A-4D9B-9A5C-6D8D7D0E5A5D}">
-                <pptd:icon xmlns:pptd="https://kimi-design.msh.team/pptd/2026" xmlns:mc="http://schemas.openxmlformats.org/markup-compatibility/2006" xmlns:m="http://schemas.openxmlformats.org/officeDocument/2006/math" xmlns:cx="http://schemas.microsoft.com/office/drawing/2014/chartex" xmlns:c="http://schemas.openxmlformats.org/drawingml/2006/chart" xmlns:a14="http://schemas.microsoft.com/office/drawing/2010/main" xmlns="" encoding="base64url">eyJpY29uTmFtZSI6ImZhczpkaXNwbGF5In0</pptd:icon>
+                <pptd:icon xmlns="" xmlns:a14="http://schemas.microsoft.com/office/drawing/2010/main" xmlns:c="http://schemas.openxmlformats.org/drawingml/2006/chart" xmlns:cx="http://schemas.microsoft.com/office/drawing/2014/chartex" xmlns:m="http://schemas.openxmlformats.org/officeDocument/2006/math" xmlns:mc="http://schemas.openxmlformats.org/markup-compatibility/2006" xmlns:pptd="https://kimi-design.msh.team/pptd/2026" encoding="base64url">eyJpY29uTmFtZSI6ImZhczpkaXNwbGF5In0</pptd:icon>
               </p:ext>
             </p:extLst>
           </p:nvPr>
         </p:nvSpPr>
         <p:spPr>
           <a:xfrm>
-            <a:off x="6172200" y="2311400"/>
+            <a:off x="6823999" y="2311400"/>
             <a:ext cx="381000" cy="381000"/>
           </a:xfrm>
           <a:custGeom>
@@ -2438,14 +2438,14 @@
           <p:nvPr>
             <p:extLst>
               <p:ext uri="{F5677B7D-0D2A-4D9B-9A5C-6D8D7D0E5A5D}">
-                <pptd:line xmlns:pptd="https://kimi-design.msh.team/pptd/2026" xmlns:mc="http://schemas.openxmlformats.org/markup-compatibility/2006" xmlns:m="http://schemas.openxmlformats.org/officeDocument/2006/math" xmlns:cx="http://schemas.microsoft.com/office/drawing/2014/chartex" xmlns:c="http://schemas.openxmlformats.org/drawingml/2006/chart" xmlns:a14="http://schemas.microsoft.com/office/drawing/2010/main" xmlns="" encoding="base64url">eyJ2aWV3Qm94IjpbNDAsMV0sInBvaW50cyI6IjAsMCA0MCwwIn0</pptd:line>
+                <pptd:line xmlns="" xmlns:a14="http://schemas.microsoft.com/office/drawing/2010/main" xmlns:c="http://schemas.openxmlformats.org/drawingml/2006/chart" xmlns:cx="http://schemas.microsoft.com/office/drawing/2014/chartex" xmlns:m="http://schemas.openxmlformats.org/officeDocument/2006/math" xmlns:mc="http://schemas.openxmlformats.org/markup-compatibility/2006" xmlns:pptd="https://kimi-design.msh.team/pptd/2026" encoding="base64url">eyJ2aWV3Qm94IjpbNDAsMV0sInBvaW50cyI6IjAsMCA0MCwwIn0</pptd:line>
               </p:ext>
             </p:extLst>
           </p:nvPr>
         </p:nvSpPr>
         <p:spPr>
           <a:xfrm>
-            <a:off x="8343900" y="2514600"/>
+            <a:off x="8995699" y="2514600"/>
             <a:ext cx="508000" cy="12700"/>
           </a:xfrm>
           <a:custGeom>
@@ -2482,15 +2482,15 @@
           <p:nvPr>
             <p:extLst>
               <p:ext uri="{F5677B7D-0D2A-4D9B-9A5C-6D8D7D0E5A5D}">
-                <pptd:icon xmlns:pptd="https://kimi-design.msh.team/pptd/2026" xmlns:mc="http://schemas.openxmlformats.org/markup-compatibility/2006" xmlns:m="http://schemas.openxmlformats.org/officeDocument/2006/math" xmlns:cx="http://schemas.microsoft.com/office/drawing/2014/chartex" xmlns:c="http://schemas.openxmlformats.org/drawingml/2006/chart" xmlns:a14="http://schemas.microsoft.com/office/drawing/2010/main" xmlns="" encoding="base64url">eyJpY29uTmFtZSI6ImZhczpnZWFycyJ9</pptd:icon>
+                <pptd:icon xmlns="" xmlns:a14="http://schemas.microsoft.com/office/drawing/2010/main" xmlns:c="http://schemas.openxmlformats.org/drawingml/2006/chart" xmlns:cx="http://schemas.microsoft.com/office/drawing/2014/chartex" xmlns:m="http://schemas.openxmlformats.org/officeDocument/2006/math" xmlns:mc="http://schemas.openxmlformats.org/markup-compatibility/2006" xmlns:pptd="https://kimi-design.msh.team/pptd/2026" encoding="base64url">eyJpY29uTmFtZSI6ImZhczpnZWFycyJ9</pptd:icon>
               </p:ext>
             </p:extLst>
           </p:nvPr>
         </p:nvSpPr>
         <p:spPr>
           <a:xfrm>
-            <a:off x="8953500" y="2311400"/>
-            <a:ext cx="381000" cy="381000"/>
+            <a:off x="9605298" y="2311400"/>
+            <a:ext cx="508000" cy="381000"/>
           </a:xfrm>
           <a:custGeom>
             <a:avLst/>
@@ -2968,7 +2968,7 @@
           <p:nvPr>
             <p:extLst>
               <p:ext uri="{F5677B7D-0D2A-4D9B-9A5C-6D8D7D0E5A5D}">
-                <pptd:line xmlns:pptd="https://kimi-design.msh.team/pptd/2026" xmlns:mc="http://schemas.openxmlformats.org/markup-compatibility/2006" xmlns:m="http://schemas.openxmlformats.org/officeDocument/2006/math" xmlns:cx="http://schemas.microsoft.com/office/drawing/2014/chartex" xmlns:c="http://schemas.openxmlformats.org/drawingml/2006/chart" xmlns:a14="http://schemas.microsoft.com/office/drawing/2010/main" xmlns="" encoding="base64url">eyJ2aWV3Qm94IjpbODY0LDFdLCJwb2ludHMiOiIwLDAgODY0LDAifQ</pptd:line>
+                <pptd:line xmlns="" xmlns:a14="http://schemas.microsoft.com/office/drawing/2010/main" xmlns:c="http://schemas.openxmlformats.org/drawingml/2006/chart" xmlns:cx="http://schemas.microsoft.com/office/drawing/2014/chartex" xmlns:m="http://schemas.openxmlformats.org/officeDocument/2006/math" xmlns:mc="http://schemas.openxmlformats.org/markup-compatibility/2006" xmlns:pptd="https://kimi-design.msh.team/pptd/2026" encoding="base64url">eyJ2aWV3Qm94IjpbODY0LDFdLCJwb2ludHMiOiIwLDAgODY0LDAifQ</pptd:line>
               </p:ext>
             </p:extLst>
           </p:nvPr>
@@ -3149,7 +3149,7 @@
           <p:nvPr>
             <p:extLst>
               <p:ext uri="{F5677B7D-0D2A-4D9B-9A5C-6D8D7D0E5A5D}">
-                <pptd:line xmlns:pptd="https://kimi-design.msh.team/pptd/2026" xmlns:mc="http://schemas.openxmlformats.org/markup-compatibility/2006" xmlns:m="http://schemas.openxmlformats.org/officeDocument/2006/math" xmlns:cx="http://schemas.microsoft.com/office/drawing/2014/chartex" xmlns:c="http://schemas.openxmlformats.org/drawingml/2006/chart" xmlns:a14="http://schemas.microsoft.com/office/drawing/2010/main" xmlns="" encoding="base64url">eyJ2aWV3Qm94IjpbMSwxMTRdLCJwb2ludHMiOiIwLDAgMCwxMTQifQ</pptd:line>
+                <pptd:line xmlns="" xmlns:a14="http://schemas.microsoft.com/office/drawing/2010/main" xmlns:c="http://schemas.openxmlformats.org/drawingml/2006/chart" xmlns:cx="http://schemas.microsoft.com/office/drawing/2014/chartex" xmlns:m="http://schemas.openxmlformats.org/officeDocument/2006/math" xmlns:mc="http://schemas.openxmlformats.org/markup-compatibility/2006" xmlns:pptd="https://kimi-design.msh.team/pptd/2026" encoding="base64url">eyJ2aWV3Qm94IjpbMSwxMTRdLCJwb2ludHMiOiIwLDAgMCwxMTQifQ</pptd:line>
               </p:ext>
             </p:extLst>
           </p:nvPr>
